--- a/cursos/recursos/estrategia-y-tactica/08-sacrificios-en-h7-h2.pptx
+++ b/cursos/recursos/estrategia-y-tactica/08-sacrificios-en-h7-h2.pptx
@@ -1602,7 +1602,7 @@
                 <a:ea typeface="Calibri" pitchFamily="34" charset="-122"/>
                 <a:cs typeface="Calibri" pitchFamily="34" charset="-120"/>
               </a:rPr>
-              <a:t>El sacrificio clásico Bxh7+ (o Bxh2+ para negras) seguido de Ng5+ y Qh5 es uno de los patrones de ataque más estudiados de la historia.</a:t>
+              <a:t>El sacrificio clásico Axh7+ (o Axh2+ para negras) seguido de Cg5+ y Dh5 es uno de los patrones de ataque más estudiados de la historia.</a:t>
             </a:r>
             <a:endParaRPr lang="en-US" sz="1600" dirty="0"/>
           </a:p>
